--- a/Reporte170426.pptx
+++ b/Reporte170426.pptx
@@ -6172,10 +6172,10 @@
       </p:sp>
       <p:pic>
         <p:nvPicPr>
-          <p:cNvPr id="3" name="Imagen 2">
+          <p:cNvPr id="4" name="Imagen 3">
             <a:extLst>
               <a:ext uri="{FF2B5EF4-FFF2-40B4-BE49-F238E27FC236}">
-                <a16:creationId xmlns:a16="http://schemas.microsoft.com/office/drawing/2014/main" id="{C57408E7-70B8-89D3-291C-D128DC293B30}"/>
+                <a16:creationId xmlns:a16="http://schemas.microsoft.com/office/drawing/2014/main" id="{D89E7A24-E739-F38D-D435-29810DCCBDDF}"/>
               </a:ext>
             </a:extLst>
           </p:cNvPr>
@@ -6192,8 +6192,8 @@
         </p:blipFill>
         <p:spPr>
           <a:xfrm>
-            <a:off x="0" y="1511981"/>
-            <a:ext cx="9144000" cy="2119537"/>
+            <a:off x="0" y="1468164"/>
+            <a:ext cx="9144000" cy="2207172"/>
           </a:xfrm>
           <a:prstGeom prst="rect">
             <a:avLst/>
@@ -6276,10 +6276,10 @@
       </p:sp>
       <p:pic>
         <p:nvPicPr>
-          <p:cNvPr id="4" name="Imagen 3">
+          <p:cNvPr id="3" name="Imagen 2">
             <a:extLst>
               <a:ext uri="{FF2B5EF4-FFF2-40B4-BE49-F238E27FC236}">
-                <a16:creationId xmlns:a16="http://schemas.microsoft.com/office/drawing/2014/main" id="{6AD8D3A9-2BAF-7ACC-C390-C284690FD413}"/>
+                <a16:creationId xmlns:a16="http://schemas.microsoft.com/office/drawing/2014/main" id="{8941367D-5C2A-65F8-B582-D1711C342608}"/>
               </a:ext>
             </a:extLst>
           </p:cNvPr>
@@ -6296,8 +6296,8 @@
         </p:blipFill>
         <p:spPr>
           <a:xfrm>
-            <a:off x="1656943" y="514063"/>
-            <a:ext cx="5830114" cy="4115374"/>
+            <a:off x="0" y="952343"/>
+            <a:ext cx="9144000" cy="3238814"/>
           </a:xfrm>
           <a:prstGeom prst="rect">
             <a:avLst/>
@@ -6379,10 +6379,10 @@
       </p:sp>
       <p:pic>
         <p:nvPicPr>
-          <p:cNvPr id="3" name="Imagen 2">
+          <p:cNvPr id="4" name="Imagen 3">
             <a:extLst>
               <a:ext uri="{FF2B5EF4-FFF2-40B4-BE49-F238E27FC236}">
-                <a16:creationId xmlns:a16="http://schemas.microsoft.com/office/drawing/2014/main" id="{479CF05C-5F2D-BAFD-0824-788EBD97ABB7}"/>
+                <a16:creationId xmlns:a16="http://schemas.microsoft.com/office/drawing/2014/main" id="{E7460611-BE8C-FB39-B48E-0046F824432E}"/>
               </a:ext>
             </a:extLst>
           </p:cNvPr>
@@ -6399,8 +6399,8 @@
         </p:blipFill>
         <p:spPr>
           <a:xfrm>
-            <a:off x="0" y="517978"/>
-            <a:ext cx="9144000" cy="4107543"/>
+            <a:off x="0" y="1341963"/>
+            <a:ext cx="9144000" cy="2459574"/>
           </a:xfrm>
           <a:prstGeom prst="rect">
             <a:avLst/>
@@ -6865,10 +6865,10 @@
       </p:sp>
       <p:pic>
         <p:nvPicPr>
-          <p:cNvPr id="4" name="Imagen 3">
+          <p:cNvPr id="5" name="Imagen 4">
             <a:extLst>
               <a:ext uri="{FF2B5EF4-FFF2-40B4-BE49-F238E27FC236}">
-                <a16:creationId xmlns:a16="http://schemas.microsoft.com/office/drawing/2014/main" id="{73C27E4B-D78F-4A5A-0FDA-E5BC85E036D2}"/>
+                <a16:creationId xmlns:a16="http://schemas.microsoft.com/office/drawing/2014/main" id="{C47F61FB-B39B-226F-86DD-9BC62726121F}"/>
               </a:ext>
             </a:extLst>
           </p:cNvPr>
@@ -6885,8 +6885,8 @@
         </p:blipFill>
         <p:spPr>
           <a:xfrm>
-            <a:off x="0" y="592147"/>
-            <a:ext cx="9144000" cy="3959206"/>
+            <a:off x="0" y="579086"/>
+            <a:ext cx="9144000" cy="3985328"/>
           </a:xfrm>
           <a:prstGeom prst="rect">
             <a:avLst/>
@@ -6963,10 +6963,10 @@
       </p:sp>
       <p:pic>
         <p:nvPicPr>
-          <p:cNvPr id="4" name="Imagen 3">
+          <p:cNvPr id="3" name="Imagen 2">
             <a:extLst>
               <a:ext uri="{FF2B5EF4-FFF2-40B4-BE49-F238E27FC236}">
-                <a16:creationId xmlns:a16="http://schemas.microsoft.com/office/drawing/2014/main" id="{E1EC2AA7-129C-54E0-7384-B7AC65471635}"/>
+                <a16:creationId xmlns:a16="http://schemas.microsoft.com/office/drawing/2014/main" id="{51FA8BA6-EBBF-5C6A-44E4-2C9107E953B0}"/>
               </a:ext>
             </a:extLst>
           </p:cNvPr>
@@ -6983,8 +6983,8 @@
         </p:blipFill>
         <p:spPr>
           <a:xfrm>
-            <a:off x="0" y="1115206"/>
-            <a:ext cx="9144000" cy="2913088"/>
+            <a:off x="0" y="1106170"/>
+            <a:ext cx="9144000" cy="2931160"/>
           </a:xfrm>
           <a:prstGeom prst="rect">
             <a:avLst/>
@@ -7067,10 +7067,10 @@
       </p:sp>
       <p:pic>
         <p:nvPicPr>
-          <p:cNvPr id="4" name="Imagen 3">
+          <p:cNvPr id="3" name="Imagen 2">
             <a:extLst>
               <a:ext uri="{FF2B5EF4-FFF2-40B4-BE49-F238E27FC236}">
-                <a16:creationId xmlns:a16="http://schemas.microsoft.com/office/drawing/2014/main" id="{279C03E5-D597-3E88-D214-3781D8482079}"/>
+                <a16:creationId xmlns:a16="http://schemas.microsoft.com/office/drawing/2014/main" id="{B1B48FDA-C9AA-202D-5A40-D7575053E620}"/>
               </a:ext>
             </a:extLst>
           </p:cNvPr>
@@ -7087,8 +7087,8 @@
         </p:blipFill>
         <p:spPr>
           <a:xfrm>
-            <a:off x="0" y="669404"/>
-            <a:ext cx="9144000" cy="3804691"/>
+            <a:off x="0" y="900049"/>
+            <a:ext cx="9144000" cy="3343401"/>
           </a:xfrm>
           <a:prstGeom prst="rect">
             <a:avLst/>
@@ -7165,10 +7165,10 @@
       </p:sp>
       <p:pic>
         <p:nvPicPr>
-          <p:cNvPr id="5" name="Imagen 4">
+          <p:cNvPr id="4" name="Imagen 3">
             <a:extLst>
               <a:ext uri="{FF2B5EF4-FFF2-40B4-BE49-F238E27FC236}">
-                <a16:creationId xmlns:a16="http://schemas.microsoft.com/office/drawing/2014/main" id="{3CAADC6D-B558-5F14-F769-CFF97F5209C1}"/>
+                <a16:creationId xmlns:a16="http://schemas.microsoft.com/office/drawing/2014/main" id="{BCC70362-0B6F-2145-1D05-587F11CB7CD8}"/>
               </a:ext>
             </a:extLst>
           </p:cNvPr>
@@ -7185,8 +7185,8 @@
         </p:blipFill>
         <p:spPr>
           <a:xfrm>
-            <a:off x="0" y="979941"/>
-            <a:ext cx="9144000" cy="3183617"/>
+            <a:off x="0" y="1043533"/>
+            <a:ext cx="9144000" cy="3056434"/>
           </a:xfrm>
           <a:prstGeom prst="rect">
             <a:avLst/>
@@ -7263,10 +7263,10 @@
       </p:sp>
       <p:pic>
         <p:nvPicPr>
-          <p:cNvPr id="4" name="Imagen 3">
+          <p:cNvPr id="3" name="Imagen 2">
             <a:extLst>
               <a:ext uri="{FF2B5EF4-FFF2-40B4-BE49-F238E27FC236}">
-                <a16:creationId xmlns:a16="http://schemas.microsoft.com/office/drawing/2014/main" id="{8B4D9D40-C5E0-3A99-F1AF-D9F43E152B4B}"/>
+                <a16:creationId xmlns:a16="http://schemas.microsoft.com/office/drawing/2014/main" id="{86B58781-F076-DD72-98F0-4B5A37F1B658}"/>
               </a:ext>
             </a:extLst>
           </p:cNvPr>
@@ -7283,8 +7283,8 @@
         </p:blipFill>
         <p:spPr>
           <a:xfrm>
-            <a:off x="0" y="1529547"/>
-            <a:ext cx="9144000" cy="2084406"/>
+            <a:off x="0" y="1501492"/>
+            <a:ext cx="9144000" cy="2140516"/>
           </a:xfrm>
           <a:prstGeom prst="rect">
             <a:avLst/>
